--- a/slides/3_model-drift_ct/lecture4_MLpipeline.pptx
+++ b/slides/3_model-drift_ct/lecture4_MLpipeline.pptx
@@ -210,7 +210,7 @@
           <a:p>
             <a:fld id="{9357E7CD-833A-4057-A34F-721214C10A5F}" type="datetimeFigureOut">
               <a:rPr lang="fr-FR" smtClean="0"/>
-              <a:t>25/03/2025</a:t>
+              <a:t>09/04/2025</a:t>
             </a:fld>
             <a:endParaRPr lang="fr-FR"/>
           </a:p>
